--- a/slides/pptx/week05.pptx
+++ b/slides/pptx/week05.pptx
@@ -699,7 +699,8 @@
           <a:p>
             <a:r>
               <a:rPr lang="en-US" dirty="0"/>
-              <a:t>Consolidation slide — leave it up during XSS Golf. All three states at once: blue = text/data, orange = the &lt; that became a live tag. Point at the orange &lt;script&gt; in row 2 ('one character, and it runs'), then the blue &amp;lt; in row 3 ('an entity — the parser shows it, never runs it'). Same story the xss-context sim animates live across the four sinks. ~3 min.</a:t>
+              <a:t>Consolidation slide — leave it up during XSS Golf. All three states at once: blue = text/data, orange = the &lt; that became a live tag. Point at the orange &lt;script&gt; in row 2 ('one character, and it runs'), then the blue &amp;lt; in row 3 ('an entity — the parser shows it, never runs it'). Same story the xss-context sim animates live across the four sinks. ~3 min.
+Diagram: Three versions of the /hello page: normal input you renders as text; injected &lt;script&gt;alert(1)&lt;/script&gt; makes the browser parse a real script tag and run it in the site's origin; and the escaped version &amp;lt;script&amp;gt;... is read as an HTML entity so the browser shows the characters and runs nothing. XSS is an output bug — encode for the context so &lt; can never start a tag.</a:t>
             </a:r>
             <a:endParaRPr lang="en-US" dirty="0"/>
           </a:p>
@@ -875,7 +876,8 @@
           <a:p>
             <a:r>
               <a:rPr lang="en-US" dirty="0"/>
-              <a:t>The step-by-step version of the bullets just covered — walk both panels left to right once. Land on the footnote: fixed_app.py kills the XSS but the CSRF still works, because encoding an output and checking a token are two unrelated fixes. ~4 min.</a:t>
+              <a:t>The step-by-step version of the bullets just covered — walk both panels left to right once. Land on the footnote: fixed_app.py kills the XSS but the CSRF still works, because encoding an output and checking a token are two unrelated fixes. ~4 min.
+Diagram: Two stacked panels comparing stored XSS with CSRF, using the same attacker/server/victim actors. Stored XSS: attacker posts a script, the victim loads it, it runs in the victim's origin and steals the cookie (no HttpOnly) — fixed by output encoding, not SameSite, since the payload is already same-origin. CSRF: the victim visits the attacker's page, which auto-submits a form; the browser attaches the cookie itself and the server can't tell the victim never meant to send it — fixed by SameSite plus a CSRF token the server actually checks, not HttpOnly, since no script ever reads the cookie.</a:t>
             </a:r>
             <a:endParaRPr lang="en-US" dirty="0"/>
           </a:p>
@@ -2746,7 +2748,7 @@
       </p:grpSpPr>
       <p:pic>
         <p:nvPicPr>
-          <p:cNvPr id="2" name="Image 0" descr="/Users/pop7/Library/CloudStorage/OneDrive-MonsterConnectCo.,Ltd/Lecture/KOSEN69 - software-security/slides/pptx/assets/logo-small.png">    </p:cNvPr>
+          <p:cNvPr id="2" name="Image 0" descr="/private/tmp/claude-501/-Users-pop7-Library-CloudStorage-OneDrive-MonsterConnectCo--Ltd-Lecture-KOSEN69---software-security/e6d6556f-17de-403d-a9a0-cf2f846149b4/scratchpad/tree/slides/pptx/assets/logo-small.png">    </p:cNvPr>
           <p:cNvPicPr>
             <a:picLocks noChangeAspect="1"/>
           </p:cNvPicPr>
@@ -3125,7 +3127,7 @@
       </p:sp>
       <p:pic>
         <p:nvPicPr>
-          <p:cNvPr id="8" name="Image 1" descr="/Users/pop7/Library/CloudStorage/OneDrive-MonsterConnectCo.,Ltd/Lecture/KOSEN69 - software-security/slides/pptx/assets/logo-small.png">    </p:cNvPr>
+          <p:cNvPr id="8" name="Image 1" descr="/private/tmp/claude-501/-Users-pop7-Library-CloudStorage-OneDrive-MonsterConnectCo--Ltd-Lecture-KOSEN69---software-security/e6d6556f-17de-403d-a9a0-cf2f846149b4/scratchpad/tree/slides/pptx/assets/logo-small.png">    </p:cNvPr>
           <p:cNvPicPr>
             <a:picLocks noChangeAspect="1"/>
           </p:cNvPicPr>
@@ -3269,16 +3271,40 @@
           </a:p>
         </p:txBody>
       </p:sp>
-      <p:sp>
-        <p:nvSpPr>
-          <p:cNvPr id="5" name="Text 2"/>
-          <p:cNvSpPr/>
-          <p:nvPr/>
-        </p:nvSpPr>
-        <p:spPr>
-          <a:xfrm>
-            <a:off x="548640" y="1325880"/>
-            <a:ext cx="8046720" cy="1645920"/>
+      <p:pic>
+        <p:nvPicPr>
+          <p:cNvPr id="5" name="Image 1" descr="Three versions of the /hello page: normal input you renders as text; injected &lt;script&gt;alert(1)&lt;/script&gt; makes the browser parse a real script tag and run it in the site's origin; and the escaped version &amp;lt;script&amp;gt;... is read as an HTML entity so the browser shows the characters and runs nothing. XSS is an output bug — encode for the context so &lt; can never start a tag.">    </p:cNvPr>
+          <p:cNvPicPr>
+            <a:picLocks noChangeAspect="1"/>
+          </p:cNvPicPr>
+          <p:nvPr/>
+        </p:nvPicPr>
+        <p:blipFill>
+          <a:blip r:embed="rId2"/>
+          <a:stretch>
+            <a:fillRect/>
+          </a:stretch>
+        </p:blipFill>
+        <p:spPr>
+          <a:xfrm>
+            <a:off x="2080360" y="1097280"/>
+            <a:ext cx="4983280" cy="3566160"/>
+          </a:xfrm>
+          <a:prstGeom prst="rect">
+            <a:avLst/>
+          </a:prstGeom>
+        </p:spPr>
+      </p:pic>
+      <p:sp>
+        <p:nvSpPr>
+          <p:cNvPr id="6" name="Text 2"/>
+          <p:cNvSpPr/>
+          <p:nvPr/>
+        </p:nvSpPr>
+        <p:spPr>
+          <a:xfrm>
+            <a:off x="457200" y="4800600"/>
+            <a:ext cx="6949440" cy="274320"/>
           </a:xfrm>
           <a:prstGeom prst="rect">
             <a:avLst/>
@@ -3287,62 +3313,21 @@
           <a:ln/>
         </p:spPr>
         <p:txBody>
-          <a:bodyPr wrap="square" lIns="0" tIns="0" rIns="0" bIns="0" rtlCol="0" anchor="t">
-            <a:normAutofit/>
-          </a:bodyPr>
+          <a:bodyPr wrap="square" lIns="0" tIns="0" rIns="0" bIns="0" rtlCol="0" anchor="ctr"/>
           <a:lstStyle/>
           <a:p>
             <a:pPr indent="0" marL="0">
               <a:buNone/>
             </a:pPr>
             <a:r>
-              <a:rPr lang="en-US" sz="1400" dirty="0">
-                <a:solidFill>
-                  <a:srgbClr val="1F2937"/>
+              <a:rPr lang="en-US" sz="900" dirty="0">
+                <a:solidFill>
+                  <a:srgbClr val="64748B"/>
                 </a:solidFill>
                 <a:latin typeface="Calibri" pitchFamily="34" charset="0"/>
                 <a:ea typeface="Calibri" pitchFamily="34" charset="-122"/>
                 <a:cs typeface="Calibri" pitchFamily="34" charset="-120"/>
               </a:rPr>
-              <a:t>See diagram: Three versions of the /hello page: normal input you renders as text; injected &lt;script&gt;alert(1)&lt;/script&gt; makes the browser parse a real script tag and run it in the site's origin; and the escaped version &amp;lt;script&amp;gt;... is read as an HTML entity so the browser shows the characters and runs nothing. XSS is an output bug — encode for the context so &lt; can never start a tag. (web only)</a:t>
-            </a:r>
-            <a:endParaRPr lang="en-US" sz="1400" dirty="0"/>
-          </a:p>
-        </p:txBody>
-      </p:sp>
-      <p:sp>
-        <p:nvSpPr>
-          <p:cNvPr id="6" name="Text 3"/>
-          <p:cNvSpPr/>
-          <p:nvPr/>
-        </p:nvSpPr>
-        <p:spPr>
-          <a:xfrm>
-            <a:off x="457200" y="4800600"/>
-            <a:ext cx="6949440" cy="274320"/>
-          </a:xfrm>
-          <a:prstGeom prst="rect">
-            <a:avLst/>
-          </a:prstGeom>
-          <a:noFill/>
-          <a:ln/>
-        </p:spPr>
-        <p:txBody>
-          <a:bodyPr wrap="square" lIns="0" tIns="0" rIns="0" bIns="0" rtlCol="0" anchor="ctr"/>
-          <a:lstStyle/>
-          <a:p>
-            <a:pPr indent="0" marL="0">
-              <a:buNone/>
-            </a:pPr>
-            <a:r>
-              <a:rPr lang="en-US" sz="900" dirty="0">
-                <a:solidFill>
-                  <a:srgbClr val="64748B"/>
-                </a:solidFill>
-                <a:latin typeface="Calibri" pitchFamily="34" charset="0"/>
-                <a:ea typeface="Calibri" pitchFamily="34" charset="-122"/>
-                <a:cs typeface="Calibri" pitchFamily="34" charset="-120"/>
-              </a:rPr>
               <a:t>Software Security · Week 5</a:t>
             </a:r>
             <a:endParaRPr lang="en-US" sz="900" dirty="0"/>
@@ -3351,14 +3336,14 @@
       </p:sp>
       <p:pic>
         <p:nvPicPr>
-          <p:cNvPr id="7" name="Image 1" descr="/Users/pop7/Library/CloudStorage/OneDrive-MonsterConnectCo.,Ltd/Lecture/KOSEN69 - software-security/slides/pptx/assets/logo-small.png">    </p:cNvPr>
+          <p:cNvPr id="7" name="Image 2" descr="/private/tmp/claude-501/-Users-pop7-Library-CloudStorage-OneDrive-MonsterConnectCo--Ltd-Lecture-KOSEN69---software-security/e6d6556f-17de-403d-a9a0-cf2f846149b4/scratchpad/tree/slides/pptx/assets/logo-small.png">    </p:cNvPr>
           <p:cNvPicPr>
             <a:picLocks noChangeAspect="1"/>
           </p:cNvPicPr>
           <p:nvPr/>
         </p:nvPicPr>
         <p:blipFill>
-          <a:blip r:embed="rId2"/>
+          <a:blip r:embed="rId3"/>
           <a:stretch>
             <a:fillRect/>
           </a:stretch>
@@ -3652,7 +3637,7 @@
       </p:sp>
       <p:pic>
         <p:nvPicPr>
-          <p:cNvPr id="8" name="Image 1" descr="/Users/pop7/Library/CloudStorage/OneDrive-MonsterConnectCo.,Ltd/Lecture/KOSEN69 - software-security/slides/pptx/assets/logo-small.png">    </p:cNvPr>
+          <p:cNvPr id="8" name="Image 1" descr="/private/tmp/claude-501/-Users-pop7-Library-CloudStorage-OneDrive-MonsterConnectCo--Ltd-Lecture-KOSEN69---software-security/e6d6556f-17de-403d-a9a0-cf2f846149b4/scratchpad/tree/slides/pptx/assets/logo-small.png">    </p:cNvPr>
           <p:cNvPicPr>
             <a:picLocks noChangeAspect="1"/>
           </p:cNvPicPr>
@@ -3796,16 +3781,40 @@
           </a:p>
         </p:txBody>
       </p:sp>
-      <p:sp>
-        <p:nvSpPr>
-          <p:cNvPr id="5" name="Text 2"/>
-          <p:cNvSpPr/>
-          <p:nvPr/>
-        </p:nvSpPr>
-        <p:spPr>
-          <a:xfrm>
-            <a:off x="548640" y="1325880"/>
-            <a:ext cx="8046720" cy="2468880"/>
+      <p:pic>
+        <p:nvPicPr>
+          <p:cNvPr id="5" name="Image 1" descr="Two stacked panels comparing stored XSS with CSRF, using the same attacker/server/victim actors. Stored XSS: attacker posts a script, the victim loads it, it runs in the victim's origin and steals the cookie (no HttpOnly) — fixed by output encoding, not SameSite, since the payload is already same-origin. CSRF: the victim visits the attacker's page, which auto-submits a form; the browser attaches the cookie itself and the server can't tell the victim never meant to send it — fixed by SameSite plus a CSRF token the server actually checks, not HttpOnly, since no script ever reads the cookie.">    </p:cNvPr>
+          <p:cNvPicPr>
+            <a:picLocks noChangeAspect="1"/>
+          </p:cNvPicPr>
+          <p:nvPr/>
+        </p:nvPicPr>
+        <p:blipFill>
+          <a:blip r:embed="rId2"/>
+          <a:stretch>
+            <a:fillRect/>
+          </a:stretch>
+        </p:blipFill>
+        <p:spPr>
+          <a:xfrm>
+            <a:off x="2753690" y="1097280"/>
+            <a:ext cx="3636620" cy="3566160"/>
+          </a:xfrm>
+          <a:prstGeom prst="rect">
+            <a:avLst/>
+          </a:prstGeom>
+        </p:spPr>
+      </p:pic>
+      <p:sp>
+        <p:nvSpPr>
+          <p:cNvPr id="6" name="Text 2"/>
+          <p:cNvSpPr/>
+          <p:nvPr/>
+        </p:nvSpPr>
+        <p:spPr>
+          <a:xfrm>
+            <a:off x="457200" y="4800600"/>
+            <a:ext cx="6949440" cy="274320"/>
           </a:xfrm>
           <a:prstGeom prst="rect">
             <a:avLst/>
@@ -3814,62 +3823,21 @@
           <a:ln/>
         </p:spPr>
         <p:txBody>
-          <a:bodyPr wrap="square" lIns="0" tIns="0" rIns="0" bIns="0" rtlCol="0" anchor="t">
-            <a:normAutofit/>
-          </a:bodyPr>
+          <a:bodyPr wrap="square" lIns="0" tIns="0" rIns="0" bIns="0" rtlCol="0" anchor="ctr"/>
           <a:lstStyle/>
           <a:p>
             <a:pPr indent="0" marL="0">
               <a:buNone/>
             </a:pPr>
             <a:r>
-              <a:rPr lang="en-US" sz="1400" dirty="0">
-                <a:solidFill>
-                  <a:srgbClr val="1F2937"/>
+              <a:rPr lang="en-US" sz="900" dirty="0">
+                <a:solidFill>
+                  <a:srgbClr val="64748B"/>
                 </a:solidFill>
                 <a:latin typeface="Calibri" pitchFamily="34" charset="0"/>
                 <a:ea typeface="Calibri" pitchFamily="34" charset="-122"/>
                 <a:cs typeface="Calibri" pitchFamily="34" charset="-120"/>
               </a:rPr>
-              <a:t>See diagram: Two stacked panels comparing stored XSS with CSRF, using the same attacker/server/victim actors. Stored XSS: attacker posts a script, the victim loads it, it runs in the victim's origin and steals the cookie (no HttpOnly) — fixed by output encoding, not SameSite, since the payload is already same-origin. CSRF: the victim visits the attacker's page, which auto-submits a form; the browser attaches the cookie itself and the server can't tell the victim never meant to send it — fixed by SameSite plus a CSRF token the server actually checks, not HttpOnly, since no script ever reads the cookie. (web only)</a:t>
-            </a:r>
-            <a:endParaRPr lang="en-US" sz="1400" dirty="0"/>
-          </a:p>
-        </p:txBody>
-      </p:sp>
-      <p:sp>
-        <p:nvSpPr>
-          <p:cNvPr id="6" name="Text 3"/>
-          <p:cNvSpPr/>
-          <p:nvPr/>
-        </p:nvSpPr>
-        <p:spPr>
-          <a:xfrm>
-            <a:off x="457200" y="4800600"/>
-            <a:ext cx="6949440" cy="274320"/>
-          </a:xfrm>
-          <a:prstGeom prst="rect">
-            <a:avLst/>
-          </a:prstGeom>
-          <a:noFill/>
-          <a:ln/>
-        </p:spPr>
-        <p:txBody>
-          <a:bodyPr wrap="square" lIns="0" tIns="0" rIns="0" bIns="0" rtlCol="0" anchor="ctr"/>
-          <a:lstStyle/>
-          <a:p>
-            <a:pPr indent="0" marL="0">
-              <a:buNone/>
-            </a:pPr>
-            <a:r>
-              <a:rPr lang="en-US" sz="900" dirty="0">
-                <a:solidFill>
-                  <a:srgbClr val="64748B"/>
-                </a:solidFill>
-                <a:latin typeface="Calibri" pitchFamily="34" charset="0"/>
-                <a:ea typeface="Calibri" pitchFamily="34" charset="-122"/>
-                <a:cs typeface="Calibri" pitchFamily="34" charset="-120"/>
-              </a:rPr>
               <a:t>Software Security · Week 5</a:t>
             </a:r>
             <a:endParaRPr lang="en-US" sz="900" dirty="0"/>
@@ -3878,14 +3846,14 @@
       </p:sp>
       <p:pic>
         <p:nvPicPr>
-          <p:cNvPr id="7" name="Image 1" descr="/Users/pop7/Library/CloudStorage/OneDrive-MonsterConnectCo.,Ltd/Lecture/KOSEN69 - software-security/slides/pptx/assets/logo-small.png">    </p:cNvPr>
+          <p:cNvPr id="7" name="Image 2" descr="/private/tmp/claude-501/-Users-pop7-Library-CloudStorage-OneDrive-MonsterConnectCo--Ltd-Lecture-KOSEN69---software-security/e6d6556f-17de-403d-a9a0-cf2f846149b4/scratchpad/tree/slides/pptx/assets/logo-small.png">    </p:cNvPr>
           <p:cNvPicPr>
             <a:picLocks noChangeAspect="1"/>
           </p:cNvPicPr>
           <p:nvPr/>
         </p:nvPicPr>
         <p:blipFill>
-          <a:blip r:embed="rId2"/>
+          <a:blip r:embed="rId3"/>
           <a:stretch>
             <a:fillRect/>
           </a:stretch>
@@ -4242,7 +4210,7 @@
       </p:sp>
       <p:pic>
         <p:nvPicPr>
-          <p:cNvPr id="10" name="Image 1" descr="/Users/pop7/Library/CloudStorage/OneDrive-MonsterConnectCo.,Ltd/Lecture/KOSEN69 - software-security/slides/pptx/assets/logo-small.png">    </p:cNvPr>
+          <p:cNvPr id="10" name="Image 1" descr="/private/tmp/claude-501/-Users-pop7-Library-CloudStorage-OneDrive-MonsterConnectCo--Ltd-Lecture-KOSEN69---software-security/e6d6556f-17de-403d-a9a0-cf2f846149b4/scratchpad/tree/slides/pptx/assets/logo-small.png">    </p:cNvPr>
           <p:cNvPicPr>
             <a:picLocks noChangeAspect="1"/>
           </p:cNvPicPr>
@@ -4543,7 +4511,7 @@
       </p:sp>
       <p:pic>
         <p:nvPicPr>
-          <p:cNvPr id="8" name="Image 1" descr="/Users/pop7/Library/CloudStorage/OneDrive-MonsterConnectCo.,Ltd/Lecture/KOSEN69 - software-security/slides/pptx/assets/logo-small.png">    </p:cNvPr>
+          <p:cNvPr id="8" name="Image 1" descr="/private/tmp/claude-501/-Users-pop7-Library-CloudStorage-OneDrive-MonsterConnectCo--Ltd-Lecture-KOSEN69---software-security/e6d6556f-17de-403d-a9a0-cf2f846149b4/scratchpad/tree/slides/pptx/assets/logo-small.png">    </p:cNvPr>
           <p:cNvPicPr>
             <a:picLocks noChangeAspect="1"/>
           </p:cNvPicPr>
@@ -4865,7 +4833,7 @@
       </p:sp>
       <p:pic>
         <p:nvPicPr>
-          <p:cNvPr id="8" name="Image 1" descr="/Users/pop7/Library/CloudStorage/OneDrive-MonsterConnectCo.,Ltd/Lecture/KOSEN69 - software-security/slides/pptx/assets/logo-small.png">    </p:cNvPr>
+          <p:cNvPr id="8" name="Image 1" descr="/private/tmp/claude-501/-Users-pop7-Library-CloudStorage-OneDrive-MonsterConnectCo--Ltd-Lecture-KOSEN69---software-security/e6d6556f-17de-403d-a9a0-cf2f846149b4/scratchpad/tree/slides/pptx/assets/logo-small.png">    </p:cNvPr>
           <p:cNvPicPr>
             <a:picLocks noChangeAspect="1"/>
           </p:cNvPicPr>
@@ -5186,7 +5154,7 @@
       </p:sp>
       <p:pic>
         <p:nvPicPr>
-          <p:cNvPr id="9" name="Image 1" descr="/Users/pop7/Library/CloudStorage/OneDrive-MonsterConnectCo.,Ltd/Lecture/KOSEN69 - software-security/slides/pptx/assets/logo-small.png">    </p:cNvPr>
+          <p:cNvPr id="9" name="Image 1" descr="/private/tmp/claude-501/-Users-pop7-Library-CloudStorage-OneDrive-MonsterConnectCo--Ltd-Lecture-KOSEN69---software-security/e6d6556f-17de-403d-a9a0-cf2f846149b4/scratchpad/tree/slides/pptx/assets/logo-small.png">    </p:cNvPr>
           <p:cNvPicPr>
             <a:picLocks noChangeAspect="1"/>
           </p:cNvPicPr>
@@ -5734,7 +5702,7 @@
       </p:sp>
       <p:pic>
         <p:nvPicPr>
-          <p:cNvPr id="17" name="Image 1" descr="/Users/pop7/Library/CloudStorage/OneDrive-MonsterConnectCo.,Ltd/Lecture/KOSEN69 - software-security/slides/pptx/assets/logo-small.png">    </p:cNvPr>
+          <p:cNvPr id="17" name="Image 1" descr="/private/tmp/claude-501/-Users-pop7-Library-CloudStorage-OneDrive-MonsterConnectCo--Ltd-Lecture-KOSEN69---software-security/e6d6556f-17de-403d-a9a0-cf2f846149b4/scratchpad/tree/slides/pptx/assets/logo-small.png">    </p:cNvPr>
           <p:cNvPicPr>
             <a:picLocks noChangeAspect="1"/>
           </p:cNvPicPr>
@@ -6019,7 +5987,7 @@
       </p:sp>
       <p:pic>
         <p:nvPicPr>
-          <p:cNvPr id="9" name="Image 1" descr="/Users/pop7/Library/CloudStorage/OneDrive-MonsterConnectCo.,Ltd/Lecture/KOSEN69 - software-security/slides/pptx/assets/logo-small.png">    </p:cNvPr>
+          <p:cNvPr id="9" name="Image 1" descr="/private/tmp/claude-501/-Users-pop7-Library-CloudStorage-OneDrive-MonsterConnectCo--Ltd-Lecture-KOSEN69---software-security/e6d6556f-17de-403d-a9a0-cf2f846149b4/scratchpad/tree/slides/pptx/assets/logo-small.png">    </p:cNvPr>
           <p:cNvPicPr>
             <a:picLocks noChangeAspect="1"/>
           </p:cNvPicPr>
@@ -6362,7 +6330,7 @@
       </p:sp>
       <p:pic>
         <p:nvPicPr>
-          <p:cNvPr id="8" name="Image 1" descr="/Users/pop7/Library/CloudStorage/OneDrive-MonsterConnectCo.,Ltd/Lecture/KOSEN69 - software-security/slides/pptx/assets/logo-small.png">    </p:cNvPr>
+          <p:cNvPr id="8" name="Image 1" descr="/private/tmp/claude-501/-Users-pop7-Library-CloudStorage-OneDrive-MonsterConnectCo--Ltd-Lecture-KOSEN69---software-security/e6d6556f-17de-403d-a9a0-cf2f846149b4/scratchpad/tree/slides/pptx/assets/logo-small.png">    </p:cNvPr>
           <p:cNvPicPr>
             <a:picLocks noChangeAspect="1"/>
           </p:cNvPicPr>
@@ -6684,7 +6652,7 @@
       </p:sp>
       <p:pic>
         <p:nvPicPr>
-          <p:cNvPr id="8" name="Image 1" descr="/Users/pop7/Library/CloudStorage/OneDrive-MonsterConnectCo.,Ltd/Lecture/KOSEN69 - software-security/slides/pptx/assets/logo-small.png">    </p:cNvPr>
+          <p:cNvPr id="8" name="Image 1" descr="/private/tmp/claude-501/-Users-pop7-Library-CloudStorage-OneDrive-MonsterConnectCo--Ltd-Lecture-KOSEN69---software-security/e6d6556f-17de-403d-a9a0-cf2f846149b4/scratchpad/tree/slides/pptx/assets/logo-small.png">    </p:cNvPr>
           <p:cNvPicPr>
             <a:picLocks noChangeAspect="1"/>
           </p:cNvPicPr>
@@ -6985,7 +6953,7 @@
       </p:sp>
       <p:pic>
         <p:nvPicPr>
-          <p:cNvPr id="8" name="Image 1" descr="/Users/pop7/Library/CloudStorage/OneDrive-MonsterConnectCo.,Ltd/Lecture/KOSEN69 - software-security/slides/pptx/assets/logo-small.png">    </p:cNvPr>
+          <p:cNvPr id="8" name="Image 1" descr="/private/tmp/claude-501/-Users-pop7-Library-CloudStorage-OneDrive-MonsterConnectCo--Ltd-Lecture-KOSEN69---software-security/e6d6556f-17de-403d-a9a0-cf2f846149b4/scratchpad/tree/slides/pptx/assets/logo-small.png">    </p:cNvPr>
           <p:cNvPicPr>
             <a:picLocks noChangeAspect="1"/>
           </p:cNvPicPr>
@@ -7119,7 +7087,7 @@
       </p:sp>
       <p:pic>
         <p:nvPicPr>
-          <p:cNvPr id="4" name="Image 0" descr="/Users/pop7/Library/CloudStorage/OneDrive-MonsterConnectCo.,Ltd/Lecture/KOSEN69 - software-security/slides/pptx/assets/logo-small.png">    </p:cNvPr>
+          <p:cNvPr id="4" name="Image 0" descr="/private/tmp/claude-501/-Users-pop7-Library-CloudStorage-OneDrive-MonsterConnectCo--Ltd-Lecture-KOSEN69---software-security/e6d6556f-17de-403d-a9a0-cf2f846149b4/scratchpad/tree/slides/pptx/assets/logo-small.png">    </p:cNvPr>
           <p:cNvPicPr>
             <a:picLocks noChangeAspect="1"/>
           </p:cNvPicPr>
@@ -7420,7 +7388,7 @@
       </p:sp>
       <p:pic>
         <p:nvPicPr>
-          <p:cNvPr id="8" name="Image 1" descr="/Users/pop7/Library/CloudStorage/OneDrive-MonsterConnectCo.,Ltd/Lecture/KOSEN69 - software-security/slides/pptx/assets/logo-small.png">    </p:cNvPr>
+          <p:cNvPr id="8" name="Image 1" descr="/private/tmp/claude-501/-Users-pop7-Library-CloudStorage-OneDrive-MonsterConnectCo--Ltd-Lecture-KOSEN69---software-security/e6d6556f-17de-403d-a9a0-cf2f846149b4/scratchpad/tree/slides/pptx/assets/logo-small.png">    </p:cNvPr>
           <p:cNvPicPr>
             <a:picLocks noChangeAspect="1"/>
           </p:cNvPicPr>
@@ -7721,7 +7689,7 @@
       </p:sp>
       <p:pic>
         <p:nvPicPr>
-          <p:cNvPr id="8" name="Image 1" descr="/Users/pop7/Library/CloudStorage/OneDrive-MonsterConnectCo.,Ltd/Lecture/KOSEN69 - software-security/slides/pptx/assets/logo-small.png">    </p:cNvPr>
+          <p:cNvPr id="8" name="Image 1" descr="/private/tmp/claude-501/-Users-pop7-Library-CloudStorage-OneDrive-MonsterConnectCo--Ltd-Lecture-KOSEN69---software-security/e6d6556f-17de-403d-a9a0-cf2f846149b4/scratchpad/tree/slides/pptx/assets/logo-small.png">    </p:cNvPr>
           <p:cNvPicPr>
             <a:picLocks noChangeAspect="1"/>
           </p:cNvPicPr>
@@ -8064,7 +8032,7 @@
       </p:sp>
       <p:pic>
         <p:nvPicPr>
-          <p:cNvPr id="10" name="Image 1" descr="/Users/pop7/Library/CloudStorage/OneDrive-MonsterConnectCo.,Ltd/Lecture/KOSEN69 - software-security/slides/pptx/assets/logo-small.png">    </p:cNvPr>
+          <p:cNvPr id="10" name="Image 1" descr="/private/tmp/claude-501/-Users-pop7-Library-CloudStorage-OneDrive-MonsterConnectCo--Ltd-Lecture-KOSEN69---software-security/e6d6556f-17de-403d-a9a0-cf2f846149b4/scratchpad/tree/slides/pptx/assets/logo-small.png">    </p:cNvPr>
           <p:cNvPicPr>
             <a:picLocks noChangeAspect="1"/>
           </p:cNvPicPr>
@@ -8849,7 +8817,7 @@
       </p:sp>
       <p:pic>
         <p:nvPicPr>
-          <p:cNvPr id="9" name="Image 1" descr="/Users/pop7/Library/CloudStorage/OneDrive-MonsterConnectCo.,Ltd/Lecture/KOSEN69 - software-security/slides/pptx/assets/logo-small.png">    </p:cNvPr>
+          <p:cNvPr id="9" name="Image 1" descr="/private/tmp/claude-501/-Users-pop7-Library-CloudStorage-OneDrive-MonsterConnectCo--Ltd-Lecture-KOSEN69---software-security/e6d6556f-17de-403d-a9a0-cf2f846149b4/scratchpad/tree/slides/pptx/assets/logo-small.png">    </p:cNvPr>
           <p:cNvPicPr>
             <a:picLocks noChangeAspect="1"/>
           </p:cNvPicPr>
@@ -9231,7 +9199,7 @@
       </p:sp>
       <p:pic>
         <p:nvPicPr>
-          <p:cNvPr id="10" name="Image 1" descr="/Users/pop7/Library/CloudStorage/OneDrive-MonsterConnectCo.,Ltd/Lecture/KOSEN69 - software-security/slides/pptx/assets/logo-small.png">    </p:cNvPr>
+          <p:cNvPr id="10" name="Image 1" descr="/private/tmp/claude-501/-Users-pop7-Library-CloudStorage-OneDrive-MonsterConnectCo--Ltd-Lecture-KOSEN69---software-security/e6d6556f-17de-403d-a9a0-cf2f846149b4/scratchpad/tree/slides/pptx/assets/logo-small.png">    </p:cNvPr>
           <p:cNvPicPr>
             <a:picLocks noChangeAspect="1"/>
           </p:cNvPicPr>
@@ -9491,7 +9459,7 @@
       </p:sp>
       <p:pic>
         <p:nvPicPr>
-          <p:cNvPr id="7" name="Image 1" descr="/Users/pop7/Library/CloudStorage/OneDrive-MonsterConnectCo.,Ltd/Lecture/KOSEN69 - software-security/slides/pptx/assets/logo-small.png">    </p:cNvPr>
+          <p:cNvPr id="7" name="Image 1" descr="/private/tmp/claude-501/-Users-pop7-Library-CloudStorage-OneDrive-MonsterConnectCo--Ltd-Lecture-KOSEN69---software-security/e6d6556f-17de-403d-a9a0-cf2f846149b4/scratchpad/tree/slides/pptx/assets/logo-small.png">    </p:cNvPr>
           <p:cNvPicPr>
             <a:picLocks noChangeAspect="1"/>
           </p:cNvPicPr>
@@ -9913,7 +9881,7 @@
       </p:sp>
       <p:pic>
         <p:nvPicPr>
-          <p:cNvPr id="10" name="Image 1" descr="/Users/pop7/Library/CloudStorage/OneDrive-MonsterConnectCo.,Ltd/Lecture/KOSEN69 - software-security/slides/pptx/assets/logo-small.png">    </p:cNvPr>
+          <p:cNvPr id="10" name="Image 1" descr="/private/tmp/claude-501/-Users-pop7-Library-CloudStorage-OneDrive-MonsterConnectCo--Ltd-Lecture-KOSEN69---software-security/e6d6556f-17de-403d-a9a0-cf2f846149b4/scratchpad/tree/slides/pptx/assets/logo-small.png">    </p:cNvPr>
           <p:cNvPicPr>
             <a:picLocks noChangeAspect="1"/>
           </p:cNvPicPr>
